--- a/docs/media/m43-pptx-export-sample.pptx
+++ b/docs/media/m43-pptx-export-sample.pptx
@@ -995,9 +995,9 @@
                 <a:solidFill>
                   <a:srgbClr val="FFFFFF"/>
                 </a:solidFill>
-                <a:latin typeface="arial" pitchFamily="34" charset="0"/>
-                <a:ea typeface="arial" pitchFamily="34" charset="-122"/>
-                <a:cs typeface="arial" pitchFamily="34" charset="-120"/>
+                <a:latin typeface="georgia" pitchFamily="34" charset="0"/>
+                <a:ea typeface="georgia" pitchFamily="34" charset="-122"/>
+                <a:cs typeface="georgia" pitchFamily="34" charset="-120"/>
               </a:rPr>
               <a:t>Quarterly Review</a:t>
             </a:r>
